--- a/catalog/samples/progress_bubble_matrix.pptx
+++ b/catalog/samples/progress_bubble_matrix.pptx
@@ -1892,7 +1892,7 @@
           </a:p>
           <a:p>
             <a:r>
-              <a:t>  "template_sha256": "b7773253c622af5b5456c31fcf2cf1e9a478203e02f7686115e7394413d84805"</a:t>
+              <a:t>  "template_sha256": "289487a924c75938e5914d9c76fa59a928cf205102f1516e7bdf4f82aab28ae2"</a:t>
             </a:r>
           </a:p>
           <a:p>
